--- a/tutorials/lab5_SoC集成与验证.pptx
+++ b/tutorials/lab5_SoC集成与验证.pptx
@@ -231,7 +231,7 @@
           <a:p>
             <a:fld id="{9ED75E01-0EF1-48C2-A225-423E6166D74A}" type="datetimeFigureOut">
               <a:rPr lang="zh-CN" altLang="en-US" smtClean="0"/>
-              <a:t>2024/10/11</a:t>
+              <a:t>2025/11/13</a:t>
             </a:fld>
             <a:endParaRPr lang="zh-CN" altLang="en-US"/>
           </a:p>
@@ -1155,7 +1155,7 @@
           <a:p>
             <a:fld id="{525738E0-514B-4B27-865A-11992516E93C}" type="datetime4">
               <a:rPr lang="en-US" altLang="zh-CN" smtClean="0"/>
-              <a:t>October 11, 2024</a:t>
+              <a:t>November 13, 2025</a:t>
             </a:fld>
             <a:endParaRPr lang="zh-CN" altLang="en-US"/>
           </a:p>
@@ -3031,7 +3031,7 @@
           <a:p>
             <a:fld id="{FB5C3CA1-B04C-4C04-8D1E-77CF30B3E24E}" type="datetime1">
               <a:rPr lang="en-US" altLang="zh-CN" smtClean="0"/>
-              <a:t>10/11/2024</a:t>
+              <a:t>11/13/2025</a:t>
             </a:fld>
             <a:endParaRPr lang="en-US"/>
           </a:p>
@@ -4316,7 +4316,7 @@
             </a:pPr>
             <a:fld id="{0E0D492D-E599-4F0D-BA78-6EEA0311D34C}" type="datetime4">
               <a:rPr lang="en-US" altLang="zh-CN" smtClean="0"/>
-              <a:t>October 11, 2024</a:t>
+              <a:t>November 13, 2025</a:t>
             </a:fld>
             <a:endParaRPr lang="en-US" altLang="zh-CN">
               <a:cs typeface="Arial" charset="0"/>
@@ -4625,7 +4625,7 @@
             </a:pPr>
             <a:fld id="{D67BBE8C-0A4B-43CE-9430-1242DFAA7339}" type="datetime4">
               <a:rPr lang="en-US" altLang="zh-CN" smtClean="0"/>
-              <a:t>October 11, 2024</a:t>
+              <a:t>November 13, 2025</a:t>
             </a:fld>
             <a:endParaRPr lang="en-US" altLang="zh-CN">
               <a:cs typeface="Arial" charset="0"/>
@@ -4766,7 +4766,7 @@
             </a:pPr>
             <a:fld id="{4E341A39-4A90-477E-8107-2FD1A1C95399}" type="datetime4">
               <a:rPr lang="en-US" altLang="zh-CN" smtClean="0"/>
-              <a:t>October 11, 2024</a:t>
+              <a:t>November 13, 2025</a:t>
             </a:fld>
             <a:endParaRPr lang="en-US" altLang="zh-CN">
               <a:cs typeface="Arial" charset="0"/>
@@ -5071,7 +5071,7 @@
             </a:pPr>
             <a:fld id="{0629EA72-D578-4F57-BEAD-86CF28FC678C}" type="datetime4">
               <a:rPr lang="en-US" altLang="zh-CN" smtClean="0"/>
-              <a:t>October 11, 2024</a:t>
+              <a:t>November 13, 2025</a:t>
             </a:fld>
             <a:endParaRPr lang="en-US" altLang="zh-CN">
               <a:cs typeface="Arial" charset="0"/>
@@ -5863,7 +5863,6 @@
             <a:noFill/>
           </a:ln>
           <a:effectLst/>
-          <a:extLst/>
         </p:spPr>
         <p:txBody>
           <a:bodyPr vert="horz" wrap="square" lIns="91440" tIns="45720" rIns="91440" bIns="45720" numCol="1" anchor="b" anchorCtr="0" compatLnSpc="1">
@@ -5910,7 +5909,6 @@
             <a:noFill/>
           </a:ln>
           <a:effectLst/>
-          <a:extLst/>
         </p:spPr>
         <p:txBody>
           <a:bodyPr vert="horz" wrap="square" lIns="91440" tIns="45720" rIns="91440" bIns="45720" numCol="1" anchor="b" anchorCtr="0" compatLnSpc="1">
@@ -6507,7 +6505,6 @@
             <a:noFill/>
           </a:ln>
           <a:effectLst/>
-          <a:extLst/>
         </p:spPr>
         <p:txBody>
           <a:bodyPr vert="horz" wrap="square" lIns="91440" tIns="45720" rIns="91440" bIns="45720" numCol="1" anchor="b" anchorCtr="0" compatLnSpc="1">
@@ -6529,7 +6526,7 @@
             </a:pPr>
             <a:fld id="{D6C2F118-23C6-4D76-A422-251B03B97126}" type="datetime4">
               <a:rPr lang="en-US" altLang="zh-CN" smtClean="0"/>
-              <a:t>October 11, 2024</a:t>
+              <a:t>November 13, 2025</a:t>
             </a:fld>
             <a:endParaRPr lang="en-US" altLang="zh-CN">
               <a:cs typeface="Arial" charset="0"/>
@@ -7067,7 +7064,7 @@
           <a:p>
             <a:r>
               <a:rPr lang="en-US" altLang="zh-CN" sz="2800" dirty="0"/>
-              <a:t>2024</a:t>
+              <a:t>2025</a:t>
             </a:r>
             <a:r>
               <a:rPr lang="zh-CN" altLang="en-US" sz="2800" dirty="0"/>
@@ -7075,7 +7072,7 @@
             </a:r>
             <a:r>
               <a:rPr lang="en-US" altLang="zh-CN" sz="2800" dirty="0"/>
-              <a:t>10</a:t>
+              <a:t>11</a:t>
             </a:r>
             <a:r>
               <a:rPr lang="zh-CN" altLang="en-US" sz="2800" dirty="0"/>
@@ -7083,7 +7080,7 @@
             </a:r>
             <a:r>
               <a:rPr lang="en-US" altLang="zh-CN" sz="2800" dirty="0"/>
-              <a:t>11</a:t>
+              <a:t>13</a:t>
             </a:r>
             <a:r>
               <a:rPr lang="zh-CN" altLang="en-US" sz="2800" dirty="0"/>
@@ -8484,7 +8481,7 @@
         <a:sysClr val="windowText" lastClr="000000"/>
       </a:dk1>
       <a:lt1>
-        <a:sysClr val="window" lastClr="CEEACA"/>
+        <a:sysClr val="window" lastClr="CCEDC7"/>
       </a:lt1>
       <a:dk2>
         <a:srgbClr val="1F497D"/>
